--- a/courses/investment-portfolio/05-capacity-decision-case.pptx
+++ b/courses/investment-portfolio/05-capacity-decision-case.pptx
@@ -4040,20 +4040,40 @@
           <a:lstStyle/>
           <a:p>
             <a:r>
-              <a:rPr lang="en-US"/>
+              <a:rPr lang="en-US" dirty="0"/>
               <a:t>2025年6月16日，中国基金报等媒体报道衍复投资向渠道发布公告：计划自7月1日起关闭中证500、中证1000、万得小市值概念指数增强产品的新客户申购；已持有投资者追加不受影响，其他指数增强策略产品线正常开放。</a:t>
             </a:r>
           </a:p>
           <a:p>
             <a:r>
-              <a:rPr lang="en-US"/>
+              <a:rPr lang="en-US" dirty="0"/>
               <a:t>教学重点是工具边界：暂停新客申购可以控制新增资金，同时保留存量客户追加，并不等于公司所有产品统一封盘。公告给出的表述是战略规划与投资者利益综合考量；没有公开完整成本模型、策略AUM、换手和目标净超额，不能据此反推出容量数值。</a:t>
             </a:r>
           </a:p>
           <a:p>
             <a:r>
-              <a:rPr lang="en-US"/>
-              <a:t>中国基金报：https://www.chnfund.com/article/ARade42a48-5582-3a66-d9b4-3a1a8a83e1a5；中国证券报：https://jnzstatic.cs.com.cn/zzb/htmlInfo/98c296ab15814ec7b9b57c43d533f041.html</a:t>
+              <a:rPr lang="en-US" dirty="0" err="1"/>
+              <a:t>中国基金报：https</a:t>
+            </a:r>
+            <a:r>
+              <a:rPr lang="en-US" dirty="0"/>
+              <a:t>://www.chnfund.com/article/ARade42a48-5582-3a66-d9b4-3a1a8a83e1a5；中国证券报：https://jnzstatic.cs.com.cn/</a:t>
+            </a:r>
+            <a:r>
+              <a:rPr lang="en-US" dirty="0" err="1"/>
+              <a:t>zzb</a:t>
+            </a:r>
+            <a:r>
+              <a:rPr lang="en-US" dirty="0"/>
+              <a:t>/</a:t>
+            </a:r>
+            <a:r>
+              <a:rPr lang="en-US" dirty="0" err="1"/>
+              <a:t>htmlInfo</a:t>
+            </a:r>
+            <a:r>
+              <a:rPr lang="en-US" dirty="0"/>
+              <a:t>/98c296ab15814ec7b9b57c43d533f041.html</a:t>
             </a:r>
           </a:p>
         </p:txBody>
@@ -21075,30 +21095,6 @@
           </a:ln>
         </p:spPr>
       </p:cxnSp>
-      <p:pic>
-        <p:nvPicPr>
-          <p:cNvPr id="8" name="Picture 8" descr="主动基金策略容量课件页脚标识"/>
-          <p:cNvPicPr>
-            <a:picLocks noChangeAspect="1"/>
-          </p:cNvPicPr>
-          <p:nvPr/>
-        </p:nvPicPr>
-        <p:blipFill>
-          <a:blip r:embed="rId4"/>
-          <a:stretch>
-            <a:fillRect/>
-          </a:stretch>
-        </p:blipFill>
-        <p:spPr>
-          <a:xfrm>
-            <a:off x="10668000" y="6318250"/>
-            <a:ext cx="1524000" cy="539750"/>
-          </a:xfrm>
-          <a:prstGeom prst="rect">
-            <a:avLst/>
-          </a:prstGeom>
-        </p:spPr>
-      </p:pic>
     </p:spTree>
     <p:custDataLst>
       <p:tags r:id="rId1"/>
